--- a/reports/medicare_partd_opioid_prescribing_analysis_poster.pptx
+++ b/reports/medicare_partd_opioid_prescribing_analysis_poster.pptx
@@ -5207,6 +5207,45 @@
           </a:prstGeom>
         </p:spPr>
       </p:pic>
+      <p:sp>
+        <p:nvSpPr>
+          <p:cNvPr id="6" name="TextBox 5">
+            <a:extLst>
+              <a:ext uri="{FF2B5EF4-FFF2-40B4-BE49-F238E27FC236}">
+                <a16:creationId xmlns:a16="http://schemas.microsoft.com/office/drawing/2014/main" id="{756CB27A-63FC-785E-B079-9CC737EF6EC4}"/>
+              </a:ext>
+            </a:extLst>
+          </p:cNvPr>
+          <p:cNvSpPr txBox="1"/>
+          <p:nvPr/>
+        </p:nvSpPr>
+        <p:spPr>
+          <a:xfrm>
+            <a:off x="573224" y="42480180"/>
+            <a:ext cx="37727824" cy="1323439"/>
+          </a:xfrm>
+          <a:prstGeom prst="rect">
+            <a:avLst/>
+          </a:prstGeom>
+          <a:noFill/>
+        </p:spPr>
+        <p:txBody>
+          <a:bodyPr wrap="square">
+            <a:spAutoFit/>
+          </a:bodyPr>
+          <a:lstStyle/>
+          <a:p>
+            <a:r>
+              <a:rPr lang="en-US" sz="4000" dirty="0">
+                <a:solidFill>
+                  <a:schemeClr val="bg1"/>
+                </a:solidFill>
+              </a:rPr>
+              <a:t>This poster has been adapted from an academic capstone project. University branding has been removed, and the analysis is presented for educational and portfolio purposes using publicly available CMS Medicare Part D data.</a:t>
+            </a:r>
+          </a:p>
+        </p:txBody>
+      </p:sp>
     </p:spTree>
     <p:extLst>
       <p:ext uri="{BB962C8B-B14F-4D97-AF65-F5344CB8AC3E}">
@@ -5809,9 +5848,12 @@
 </file>
 
 <file path=customXml/item1.xml><?xml version="1.0" encoding="utf-8"?>
-<p:properties xmlns:p="http://schemas.microsoft.com/office/2006/metadata/properties" xmlns:xsi="http://www.w3.org/2001/XMLSchema-instance" xmlns:pc="http://schemas.microsoft.com/office/infopath/2007/PartnerControls">
-  <documentManagement/>
-</p:properties>
+<?mso-contentType ?>
+<FormTemplates xmlns="http://schemas.microsoft.com/sharepoint/v3/contenttype/forms">
+  <Display>DocumentLibraryForm</Display>
+  <Edit>DocumentLibraryForm</Edit>
+  <New>DocumentLibraryForm</New>
+</FormTemplates>
 </file>
 
 <file path=customXml/item2.xml><?xml version="1.0" encoding="utf-8"?>
@@ -5983,26 +6025,15 @@
 </file>
 
 <file path=customXml/item3.xml><?xml version="1.0" encoding="utf-8"?>
-<?mso-contentType ?>
-<FormTemplates xmlns="http://schemas.microsoft.com/sharepoint/v3/contenttype/forms">
-  <Display>DocumentLibraryForm</Display>
-  <Edit>DocumentLibraryForm</Edit>
-  <New>DocumentLibraryForm</New>
-</FormTemplates>
+<p:properties xmlns:p="http://schemas.microsoft.com/office/2006/metadata/properties" xmlns:xsi="http://www.w3.org/2001/XMLSchema-instance" xmlns:pc="http://schemas.microsoft.com/office/infopath/2007/PartnerControls">
+  <documentManagement/>
+</p:properties>
 </file>
 
 <file path=customXml/itemProps1.xml><?xml version="1.0" encoding="utf-8"?>
-<ds:datastoreItem xmlns:ds="http://schemas.openxmlformats.org/officeDocument/2006/customXml" ds:itemID="{4679AB12-C3B6-42F5-802F-D9F892327599}">
+<ds:datastoreItem xmlns:ds="http://schemas.openxmlformats.org/officeDocument/2006/customXml" ds:itemID="{A8772C38-02AC-4397-8CD1-D8DDFBFDE7F6}">
   <ds:schemaRefs>
-    <ds:schemaRef ds:uri="http://purl.org/dc/elements/1.1/"/>
-    <ds:schemaRef ds:uri="http://schemas.microsoft.com/office/2006/metadata/properties"/>
-    <ds:schemaRef ds:uri="http://purl.org/dc/terms/"/>
-    <ds:schemaRef ds:uri="91c42061-487b-46c6-9517-fb7d509aa8e2"/>
-    <ds:schemaRef ds:uri="http://purl.org/dc/dcmitype/"/>
-    <ds:schemaRef ds:uri="http://schemas.microsoft.com/office/2006/documentManagement/types"/>
-    <ds:schemaRef ds:uri="http://www.w3.org/XML/1998/namespace"/>
-    <ds:schemaRef ds:uri="http://schemas.microsoft.com/office/infopath/2007/PartnerControls"/>
-    <ds:schemaRef ds:uri="http://schemas.openxmlformats.org/package/2006/metadata/core-properties"/>
+    <ds:schemaRef ds:uri="http://schemas.microsoft.com/sharepoint/v3/contenttype/forms"/>
   </ds:schemaRefs>
 </ds:datastoreItem>
 </file>
@@ -6026,9 +6057,17 @@
 </file>
 
 <file path=customXml/itemProps3.xml><?xml version="1.0" encoding="utf-8"?>
-<ds:datastoreItem xmlns:ds="http://schemas.openxmlformats.org/officeDocument/2006/customXml" ds:itemID="{A8772C38-02AC-4397-8CD1-D8DDFBFDE7F6}">
+<ds:datastoreItem xmlns:ds="http://schemas.openxmlformats.org/officeDocument/2006/customXml" ds:itemID="{4679AB12-C3B6-42F5-802F-D9F892327599}">
   <ds:schemaRefs>
-    <ds:schemaRef ds:uri="http://schemas.microsoft.com/sharepoint/v3/contenttype/forms"/>
+    <ds:schemaRef ds:uri="http://purl.org/dc/elements/1.1/"/>
+    <ds:schemaRef ds:uri="http://schemas.microsoft.com/office/2006/metadata/properties"/>
+    <ds:schemaRef ds:uri="http://purl.org/dc/terms/"/>
+    <ds:schemaRef ds:uri="91c42061-487b-46c6-9517-fb7d509aa8e2"/>
+    <ds:schemaRef ds:uri="http://purl.org/dc/dcmitype/"/>
+    <ds:schemaRef ds:uri="http://schemas.microsoft.com/office/2006/documentManagement/types"/>
+    <ds:schemaRef ds:uri="http://www.w3.org/XML/1998/namespace"/>
+    <ds:schemaRef ds:uri="http://schemas.microsoft.com/office/infopath/2007/PartnerControls"/>
+    <ds:schemaRef ds:uri="http://schemas.openxmlformats.org/package/2006/metadata/core-properties"/>
   </ds:schemaRefs>
 </ds:datastoreItem>
 </file>